--- a/presentation/MVKobraAI_Presentacion_Gerencial.pptx
+++ b/presentation/MVKobraAI_Presentacion_Gerencial.pptx
@@ -3101,7 +3101,7 @@
     <p:bg>
       <p:bgPr>
         <a:solidFill>
-          <a:srgbClr val="0E1117"/>
+          <a:srgbClr val="081527"/>
         </a:solidFill>
         <a:effectLst/>
       </p:bgPr>
@@ -3157,7 +3157,7 @@
       </p:sp>
       <p:pic>
         <p:nvPicPr>
-          <p:cNvPr id="3" name="Picture 2" descr="kobra_icon.png"/>
+          <p:cNvPr id="3" name="Picture 2" descr="mv_icon.png"/>
           <p:cNvPicPr>
             <a:picLocks noChangeAspect="1"/>
           </p:cNvPicPr>
@@ -3209,7 +3209,7 @@
                 </a:solidFill>
                 <a:latin typeface="Segoe UI"/>
               </a:rPr>
-              <a:t>Kobra IA</a:t>
+              <a:t>MV Kobra AI</a:t>
             </a:r>
           </a:p>
         </p:txBody>
@@ -3240,7 +3240,7 @@
             <a:r>
               <a:rPr sz="2800" b="0">
                 <a:solidFill>
-                  <a:srgbClr val="F5F6FA"/>
+                  <a:srgbClr val="EAF1FB"/>
                 </a:solidFill>
                 <a:latin typeface="Segoe UI"/>
               </a:rPr>
@@ -3275,7 +3275,7 @@
             <a:r>
               <a:rPr sz="1700" b="0">
                 <a:solidFill>
-                  <a:srgbClr val="9AA4B2"/>
+                  <a:srgbClr val="9DB0C8"/>
                 </a:solidFill>
                 <a:latin typeface="Segoe UI"/>
               </a:rPr>
@@ -3310,7 +3310,7 @@
             <a:r>
               <a:rPr sz="1200" b="0">
                 <a:solidFill>
-                  <a:srgbClr val="9AA4B2"/>
+                  <a:srgbClr val="9DB0C8"/>
                 </a:solidFill>
                 <a:latin typeface="Segoe UI"/>
               </a:rPr>
@@ -3333,7 +3333,7 @@
     <p:bg>
       <p:bgPr>
         <a:solidFill>
-          <a:srgbClr val="0E1117"/>
+          <a:srgbClr val="081527"/>
         </a:solidFill>
         <a:effectLst/>
       </p:bgPr>
@@ -3406,7 +3406,7 @@
             <a:r>
               <a:rPr sz="1500" b="0">
                 <a:solidFill>
-                  <a:srgbClr val="9AA4B2"/>
+                  <a:srgbClr val="9DB0C8"/>
                 </a:solidFill>
                 <a:latin typeface="Segoe UI"/>
               </a:rPr>
@@ -3432,7 +3432,7 @@
           <a:noFill/>
           <a:ln w="12700">
             <a:solidFill>
-              <a:srgbClr val="6C5CE7"/>
+              <a:srgbClr val="2F74C0"/>
             </a:solidFill>
           </a:ln>
           <a:effectLst/>
@@ -3497,7 +3497,7 @@
     <p:bg>
       <p:bgPr>
         <a:solidFill>
-          <a:srgbClr val="0E1117"/>
+          <a:srgbClr val="081527"/>
         </a:solidFill>
         <a:effectLst/>
       </p:bgPr>
@@ -3570,7 +3570,7 @@
             <a:r>
               <a:rPr sz="1500" b="0">
                 <a:solidFill>
-                  <a:srgbClr val="9AA4B2"/>
+                  <a:srgbClr val="9DB0C8"/>
                 </a:solidFill>
                 <a:latin typeface="Segoe UI"/>
               </a:rPr>
@@ -3596,7 +3596,7 @@
           <a:noFill/>
           <a:ln w="12700">
             <a:solidFill>
-              <a:srgbClr val="6C5CE7"/>
+              <a:srgbClr val="2F74C0"/>
             </a:solidFill>
           </a:ln>
           <a:effectLst/>
@@ -3661,7 +3661,7 @@
     <p:bg>
       <p:bgPr>
         <a:solidFill>
-          <a:srgbClr val="0E1117"/>
+          <a:srgbClr val="081527"/>
         </a:solidFill>
         <a:effectLst/>
       </p:bgPr>
@@ -3734,7 +3734,7 @@
             <a:r>
               <a:rPr sz="1500" b="0">
                 <a:solidFill>
-                  <a:srgbClr val="9AA4B2"/>
+                  <a:srgbClr val="9DB0C8"/>
                 </a:solidFill>
                 <a:latin typeface="Segoe UI"/>
               </a:rPr>
@@ -3760,7 +3760,7 @@
           <a:noFill/>
           <a:ln w="12700">
             <a:solidFill>
-              <a:srgbClr val="6C5CE7"/>
+              <a:srgbClr val="2F74C0"/>
             </a:solidFill>
           </a:ln>
           <a:effectLst/>
@@ -3825,7 +3825,7 @@
     <p:bg>
       <p:bgPr>
         <a:solidFill>
-          <a:srgbClr val="0E1117"/>
+          <a:srgbClr val="081527"/>
         </a:solidFill>
         <a:effectLst/>
       </p:bgPr>
@@ -3898,7 +3898,7 @@
             <a:r>
               <a:rPr sz="1500" b="0">
                 <a:solidFill>
-                  <a:srgbClr val="9AA4B2"/>
+                  <a:srgbClr val="9DB0C8"/>
                 </a:solidFill>
                 <a:latin typeface="Segoe UI"/>
               </a:rPr>
@@ -3924,7 +3924,7 @@
           <a:noFill/>
           <a:ln w="12700">
             <a:solidFill>
-              <a:srgbClr val="6C5CE7"/>
+              <a:srgbClr val="2F74C0"/>
             </a:solidFill>
           </a:ln>
           <a:effectLst/>
@@ -3989,7 +3989,7 @@
     <p:bg>
       <p:bgPr>
         <a:solidFill>
-          <a:srgbClr val="0E1117"/>
+          <a:srgbClr val="081527"/>
         </a:solidFill>
         <a:effectLst/>
       </p:bgPr>
@@ -4062,11 +4062,11 @@
             <a:r>
               <a:rPr sz="1500" b="0">
                 <a:solidFill>
-                  <a:srgbClr val="9AA4B2"/>
-                </a:solidFill>
-                <a:latin typeface="Segoe UI"/>
-              </a:rPr>
-              <a:t>Impacto de Kobra en calidad, conversión y recupero; evolución mes a mes por gestor.</a:t>
+                  <a:srgbClr val="9DB0C8"/>
+                </a:solidFill>
+                <a:latin typeface="Segoe UI"/>
+              </a:rPr>
+              <a:t>Impacto de MV Kobra AI en calidad, conversión y recupero; evolución mes a mes por gestor.</a:t>
             </a:r>
           </a:p>
         </p:txBody>
@@ -4088,7 +4088,7 @@
           <a:noFill/>
           <a:ln w="12700">
             <a:solidFill>
-              <a:srgbClr val="6C5CE7"/>
+              <a:srgbClr val="2F74C0"/>
             </a:solidFill>
           </a:ln>
           <a:effectLst/>
@@ -4153,7 +4153,7 @@
     <p:bg>
       <p:bgPr>
         <a:solidFill>
-          <a:srgbClr val="0E1117"/>
+          <a:srgbClr val="081527"/>
         </a:solidFill>
         <a:effectLst/>
       </p:bgPr>
@@ -4191,11 +4191,11 @@
             <a:r>
               <a:rPr sz="3200" b="1">
                 <a:solidFill>
-                  <a:srgbClr val="F5F6FA"/>
-                </a:solidFill>
-                <a:latin typeface="Segoe UI"/>
-              </a:rPr>
-              <a:t>Cómo se mide el impacto de Kobra</a:t>
+                  <a:srgbClr val="EAF1FB"/>
+                </a:solidFill>
+                <a:latin typeface="Segoe UI"/>
+              </a:rPr>
+              <a:t>Cómo se mide el impacto de MV Kobra AI</a:t>
             </a:r>
           </a:p>
         </p:txBody>
@@ -4270,11 +4270,11 @@
             <a:r>
               <a:rPr sz="1500" b="0">
                 <a:solidFill>
-                  <a:srgbClr val="FDCB6E"/>
-                </a:solidFill>
-                <a:latin typeface="Segoe UI"/>
-              </a:rPr>
-              <a:t>Metodología: gestores con Kobra vs. grupo de control, mismo período. Cifras ILUSTRATIVAS sobre datos sintéticos — no son resultados medidos.</a:t>
+                  <a:srgbClr val="F2B441"/>
+                </a:solidFill>
+                <a:latin typeface="Segoe UI"/>
+              </a:rPr>
+              <a:t>Metodología: gestores con MV Kobra AI vs. grupo de control, mismo período. Cifras ILUSTRATIVAS sobre datos sintéticos — no son resultados medidos.</a:t>
             </a:r>
           </a:p>
         </p:txBody>
@@ -4294,7 +4294,7 @@
             <a:avLst/>
           </a:prstGeom>
           <a:solidFill>
-            <a:srgbClr val="1A1F2E"/>
+            <a:srgbClr val="0E1E34"/>
           </a:solidFill>
           <a:ln w="12700">
             <a:solidFill>
@@ -4355,7 +4355,7 @@
                 </a:solidFill>
                 <a:latin typeface="Segoe UI"/>
               </a:rPr>
-              <a:t>+10.2</a:t>
+              <a:t>+14.9</a:t>
             </a:r>
           </a:p>
         </p:txBody>
@@ -4386,7 +4386,7 @@
             <a:r>
               <a:rPr sz="1500" b="0">
                 <a:solidFill>
-                  <a:srgbClr val="9AA4B2"/>
+                  <a:srgbClr val="9DB0C8"/>
                 </a:solidFill>
                 <a:latin typeface="Segoe UI"/>
               </a:rPr>
@@ -4410,11 +4410,11 @@
             <a:avLst/>
           </a:prstGeom>
           <a:solidFill>
-            <a:srgbClr val="1A1F2E"/>
+            <a:srgbClr val="0E1E34"/>
           </a:solidFill>
           <a:ln w="12700">
             <a:solidFill>
-              <a:srgbClr val="6C5CE7"/>
+              <a:srgbClr val="2F74C0"/>
             </a:solidFill>
           </a:ln>
           <a:effectLst/>
@@ -4467,11 +4467,11 @@
             <a:r>
               <a:rPr sz="4400" b="1">
                 <a:solidFill>
-                  <a:srgbClr val="6C5CE7"/>
-                </a:solidFill>
-                <a:latin typeface="Segoe UI"/>
-              </a:rPr>
-              <a:t>+6.8 pp</a:t>
+                  <a:srgbClr val="2F74C0"/>
+                </a:solidFill>
+                <a:latin typeface="Segoe UI"/>
+              </a:rPr>
+              <a:t>+7.6 pp</a:t>
             </a:r>
           </a:p>
         </p:txBody>
@@ -4502,7 +4502,7 @@
             <a:r>
               <a:rPr sz="1500" b="0">
                 <a:solidFill>
-                  <a:srgbClr val="9AA4B2"/>
+                  <a:srgbClr val="9DB0C8"/>
                 </a:solidFill>
                 <a:latin typeface="Segoe UI"/>
               </a:rPr>
@@ -4526,11 +4526,11 @@
             <a:avLst/>
           </a:prstGeom>
           <a:solidFill>
-            <a:srgbClr val="1A1F2E"/>
+            <a:srgbClr val="0E1E34"/>
           </a:solidFill>
           <a:ln w="12700">
             <a:solidFill>
-              <a:srgbClr val="FDCB6E"/>
+              <a:srgbClr val="F2B441"/>
             </a:solidFill>
           </a:ln>
           <a:effectLst/>
@@ -4583,11 +4583,11 @@
             <a:r>
               <a:rPr sz="4400" b="1">
                 <a:solidFill>
-                  <a:srgbClr val="FDCB6E"/>
-                </a:solidFill>
-                <a:latin typeface="Segoe UI"/>
-              </a:rPr>
-              <a:t>+5.1 pp</a:t>
+                  <a:srgbClr val="F2B441"/>
+                </a:solidFill>
+                <a:latin typeface="Segoe UI"/>
+              </a:rPr>
+              <a:t>+5.6 pp</a:t>
             </a:r>
           </a:p>
         </p:txBody>
@@ -4618,7 +4618,7 @@
             <a:r>
               <a:rPr sz="1500" b="0">
                 <a:solidFill>
-                  <a:srgbClr val="9AA4B2"/>
+                  <a:srgbClr val="9DB0C8"/>
                 </a:solidFill>
                 <a:latin typeface="Segoe UI"/>
               </a:rPr>
@@ -4653,11 +4653,11 @@
             <a:r>
               <a:rPr sz="1400" b="0">
                 <a:solidFill>
-                  <a:srgbClr val="F5F6FA"/>
-                </a:solidFill>
-                <a:latin typeface="Segoe UI"/>
-              </a:rPr>
-              <a:t>Con Kobra: calidad 70 · conversión 68% · recupero 45%   |   Sin Kobra: calidad 60 · conversión 62% · recupero 40%</a:t>
+                  <a:srgbClr val="EAF1FB"/>
+                </a:solidFill>
+                <a:latin typeface="Segoe UI"/>
+              </a:rPr>
+              <a:t>Con MV Kobra AI: calidad 74 · conversión 70% · recupero 45%   |   Sin MV Kobra AI: calidad 60 · conversión 63% · recupero 40%</a:t>
             </a:r>
           </a:p>
         </p:txBody>
@@ -4711,7 +4711,7 @@
     <p:bg>
       <p:bgPr>
         <a:solidFill>
-          <a:srgbClr val="0E1117"/>
+          <a:srgbClr val="081527"/>
         </a:solidFill>
         <a:effectLst/>
       </p:bgPr>
@@ -4749,11 +4749,11 @@
             <a:r>
               <a:rPr sz="3200" b="1">
                 <a:solidFill>
-                  <a:srgbClr val="F5F6FA"/>
-                </a:solidFill>
-                <a:latin typeface="Segoe UI"/>
-              </a:rPr>
-              <a:t>Por qué Kobra</a:t>
+                  <a:srgbClr val="EAF1FB"/>
+                </a:solidFill>
+                <a:latin typeface="Segoe UI"/>
+              </a:rPr>
+              <a:t>Por qué MV Kobra AI</a:t>
             </a:r>
           </a:p>
         </p:txBody>
@@ -4935,7 +4935,7 @@
     <p:bg>
       <p:bgPr>
         <a:solidFill>
-          <a:srgbClr val="0E1117"/>
+          <a:srgbClr val="081527"/>
         </a:solidFill>
         <a:effectLst/>
       </p:bgPr>
@@ -4973,7 +4973,7 @@
             <a:r>
               <a:rPr sz="3200" b="1">
                 <a:solidFill>
-                  <a:srgbClr val="F5F6FA"/>
+                  <a:srgbClr val="EAF1FB"/>
                 </a:solidFill>
                 <a:latin typeface="Segoe UI"/>
               </a:rPr>
@@ -5041,7 +5041,7 @@
             <a:avLst/>
           </a:prstGeom>
           <a:solidFill>
-            <a:srgbClr val="1A1F2E"/>
+            <a:srgbClr val="0E1E34"/>
           </a:solidFill>
           <a:ln w="12700">
             <a:solidFill>
@@ -5133,7 +5133,7 @@
             <a:r>
               <a:rPr sz="1400" b="0">
                 <a:solidFill>
-                  <a:srgbClr val="F5F6FA"/>
+                  <a:srgbClr val="EAF1FB"/>
                 </a:solidFill>
                 <a:latin typeface="Segoe UI"/>
               </a:rPr>
@@ -5157,7 +5157,7 @@
             <a:avLst/>
           </a:prstGeom>
           <a:solidFill>
-            <a:srgbClr val="1A1F2E"/>
+            <a:srgbClr val="0E1E34"/>
           </a:solidFill>
           <a:ln w="12700">
             <a:solidFill>
@@ -5249,7 +5249,7 @@
             <a:r>
               <a:rPr sz="1400" b="0">
                 <a:solidFill>
-                  <a:srgbClr val="F5F6FA"/>
+                  <a:srgbClr val="EAF1FB"/>
                 </a:solidFill>
                 <a:latin typeface="Segoe UI"/>
               </a:rPr>
@@ -5273,7 +5273,7 @@
             <a:avLst/>
           </a:prstGeom>
           <a:solidFill>
-            <a:srgbClr val="1A1F2E"/>
+            <a:srgbClr val="0E1E34"/>
           </a:solidFill>
           <a:ln w="12700">
             <a:solidFill>
@@ -5365,7 +5365,7 @@
             <a:r>
               <a:rPr sz="1400" b="0">
                 <a:solidFill>
-                  <a:srgbClr val="F5F6FA"/>
+                  <a:srgbClr val="EAF1FB"/>
                 </a:solidFill>
                 <a:latin typeface="Segoe UI"/>
               </a:rPr>
@@ -5389,7 +5389,7 @@
             <a:avLst/>
           </a:prstGeom>
           <a:solidFill>
-            <a:srgbClr val="1A1F2E"/>
+            <a:srgbClr val="0E1E34"/>
           </a:solidFill>
           <a:ln w="12700">
             <a:solidFill>
@@ -5481,7 +5481,7 @@
             <a:r>
               <a:rPr sz="1400" b="0">
                 <a:solidFill>
-                  <a:srgbClr val="F5F6FA"/>
+                  <a:srgbClr val="EAF1FB"/>
                 </a:solidFill>
                 <a:latin typeface="Segoe UI"/>
               </a:rPr>
@@ -5505,7 +5505,7 @@
             <a:avLst/>
           </a:prstGeom>
           <a:solidFill>
-            <a:srgbClr val="1A1F2E"/>
+            <a:srgbClr val="0E1E34"/>
           </a:solidFill>
           <a:ln w="12700">
             <a:solidFill>
@@ -5597,7 +5597,7 @@
             <a:r>
               <a:rPr sz="1400" b="0">
                 <a:solidFill>
-                  <a:srgbClr val="F5F6FA"/>
+                  <a:srgbClr val="EAF1FB"/>
                 </a:solidFill>
                 <a:latin typeface="Segoe UI"/>
               </a:rPr>
@@ -5620,7 +5620,7 @@
     <p:bg>
       <p:bgPr>
         <a:solidFill>
-          <a:srgbClr val="0E1117"/>
+          <a:srgbClr val="081527"/>
         </a:solidFill>
         <a:effectLst/>
       </p:bgPr>
@@ -5634,7 +5634,7 @@
       <p:grpSpPr/>
       <p:pic>
         <p:nvPicPr>
-          <p:cNvPr id="2" name="Picture 1" descr="kobra_icon.png"/>
+          <p:cNvPr id="2" name="Picture 1" descr="mv_icon.png"/>
           <p:cNvPicPr>
             <a:picLocks noChangeAspect="1"/>
           </p:cNvPicPr>
@@ -5682,7 +5682,7 @@
             <a:r>
               <a:rPr sz="4000" b="1">
                 <a:solidFill>
-                  <a:srgbClr val="F5F6FA"/>
+                  <a:srgbClr val="EAF1FB"/>
                 </a:solidFill>
                 <a:latin typeface="Segoe UI"/>
               </a:rPr>
@@ -5721,7 +5721,7 @@
                 </a:solidFill>
                 <a:latin typeface="Segoe UI"/>
               </a:rPr>
-              <a:t>Kobra IA · Cobranzas Inteligentes</a:t>
+              <a:t>MV Kobra AI · Cobranzas Inteligentes</a:t>
             </a:r>
           </a:p>
         </p:txBody>
@@ -5752,7 +5752,7 @@
             <a:r>
               <a:rPr sz="1600" b="0">
                 <a:solidFill>
-                  <a:srgbClr val="9AA4B2"/>
+                  <a:srgbClr val="9DB0C8"/>
                 </a:solidFill>
                 <a:latin typeface="Segoe UI"/>
               </a:rPr>
@@ -5775,7 +5775,7 @@
     <p:bg>
       <p:bgPr>
         <a:solidFill>
-          <a:srgbClr val="0E1117"/>
+          <a:srgbClr val="081527"/>
         </a:solidFill>
         <a:effectLst/>
       </p:bgPr>
@@ -5813,7 +5813,7 @@
             <a:r>
               <a:rPr sz="3200" b="1">
                 <a:solidFill>
-                  <a:srgbClr val="F5F6FA"/>
+                  <a:srgbClr val="EAF1FB"/>
                 </a:solidFill>
                 <a:latin typeface="Segoe UI"/>
               </a:rPr>
@@ -5896,7 +5896,7 @@
             <a:r>
               <a:rPr sz="2000">
                 <a:solidFill>
-                  <a:srgbClr val="9AA4B2"/>
+                  <a:srgbClr val="9DB0C8"/>
                 </a:solidFill>
                 <a:latin typeface="Segoe UI"/>
               </a:rPr>
@@ -5912,7 +5912,7 @@
             <a:r>
               <a:rPr sz="2000">
                 <a:solidFill>
-                  <a:srgbClr val="9AA4B2"/>
+                  <a:srgbClr val="9DB0C8"/>
                 </a:solidFill>
                 <a:latin typeface="Segoe UI"/>
               </a:rPr>
@@ -5928,7 +5928,7 @@
             <a:r>
               <a:rPr sz="2000">
                 <a:solidFill>
-                  <a:srgbClr val="9AA4B2"/>
+                  <a:srgbClr val="9DB0C8"/>
                 </a:solidFill>
                 <a:latin typeface="Segoe UI"/>
               </a:rPr>
@@ -5944,7 +5944,7 @@
             <a:r>
               <a:rPr sz="2000">
                 <a:solidFill>
-                  <a:srgbClr val="9AA4B2"/>
+                  <a:srgbClr val="9DB0C8"/>
                 </a:solidFill>
                 <a:latin typeface="Segoe UI"/>
               </a:rPr>
@@ -5960,7 +5960,7 @@
             <a:r>
               <a:rPr sz="2000">
                 <a:solidFill>
-                  <a:srgbClr val="9AA4B2"/>
+                  <a:srgbClr val="9DB0C8"/>
                 </a:solidFill>
                 <a:latin typeface="Segoe UI"/>
               </a:rPr>
@@ -5995,7 +5995,7 @@
             <a:r>
               <a:rPr sz="1800" b="1">
                 <a:solidFill>
-                  <a:srgbClr val="FDCB6E"/>
+                  <a:srgbClr val="F2B441"/>
                 </a:solidFill>
                 <a:latin typeface="Segoe UI"/>
               </a:rPr>
@@ -6018,7 +6018,7 @@
     <p:bg>
       <p:bgPr>
         <a:solidFill>
-          <a:srgbClr val="0E1117"/>
+          <a:srgbClr val="081527"/>
         </a:solidFill>
         <a:effectLst/>
       </p:bgPr>
@@ -6056,11 +6056,11 @@
             <a:r>
               <a:rPr sz="3200" b="1">
                 <a:solidFill>
-                  <a:srgbClr val="F5F6FA"/>
-                </a:solidFill>
-                <a:latin typeface="Segoe UI"/>
-              </a:rPr>
-              <a:t>La solución: Kobra</a:t>
+                  <a:srgbClr val="EAF1FB"/>
+                </a:solidFill>
+                <a:latin typeface="Segoe UI"/>
+              </a:rPr>
+              <a:t>La solución: MV Kobra AI</a:t>
             </a:r>
           </a:p>
         </p:txBody>
@@ -6124,7 +6124,7 @@
             <a:avLst/>
           </a:prstGeom>
           <a:solidFill>
-            <a:srgbClr val="1A1F2E"/>
+            <a:srgbClr val="0E1E34"/>
           </a:solidFill>
           <a:ln w="12700">
             <a:solidFill>
@@ -6216,7 +6216,7 @@
             <a:r>
               <a:rPr sz="1600" b="0">
                 <a:solidFill>
-                  <a:srgbClr val="F5F6FA"/>
+                  <a:srgbClr val="EAF1FB"/>
                 </a:solidFill>
                 <a:latin typeface="Segoe UI"/>
               </a:rPr>
@@ -6275,11 +6275,11 @@
             <a:avLst/>
           </a:prstGeom>
           <a:solidFill>
-            <a:srgbClr val="1A1F2E"/>
+            <a:srgbClr val="0E1E34"/>
           </a:solidFill>
           <a:ln w="12700">
             <a:solidFill>
-              <a:srgbClr val="6C5CE7"/>
+              <a:srgbClr val="2F74C0"/>
             </a:solidFill>
           </a:ln>
           <a:effectLst/>
@@ -6332,7 +6332,7 @@
             <a:r>
               <a:rPr sz="2200" b="1">
                 <a:solidFill>
-                  <a:srgbClr val="6C5CE7"/>
+                  <a:srgbClr val="2F74C0"/>
                 </a:solidFill>
                 <a:latin typeface="Segoe UI"/>
               </a:rPr>
@@ -6367,7 +6367,7 @@
             <a:r>
               <a:rPr sz="1600" b="0">
                 <a:solidFill>
-                  <a:srgbClr val="F5F6FA"/>
+                  <a:srgbClr val="EAF1FB"/>
                 </a:solidFill>
                 <a:latin typeface="Segoe UI"/>
               </a:rPr>
@@ -6402,7 +6402,7 @@
             <a:r>
               <a:rPr sz="1300" b="1">
                 <a:solidFill>
-                  <a:srgbClr val="6C5CE7"/>
+                  <a:srgbClr val="2F74C0"/>
                 </a:solidFill>
                 <a:latin typeface="Segoe UI"/>
               </a:rPr>
@@ -6426,11 +6426,11 @@
             <a:avLst/>
           </a:prstGeom>
           <a:solidFill>
-            <a:srgbClr val="1A1F2E"/>
+            <a:srgbClr val="0E1E34"/>
           </a:solidFill>
           <a:ln w="12700">
             <a:solidFill>
-              <a:srgbClr val="FDCB6E"/>
+              <a:srgbClr val="F2B441"/>
             </a:solidFill>
           </a:ln>
           <a:effectLst/>
@@ -6483,7 +6483,7 @@
             <a:r>
               <a:rPr sz="2200" b="1">
                 <a:solidFill>
-                  <a:srgbClr val="FDCB6E"/>
+                  <a:srgbClr val="F2B441"/>
                 </a:solidFill>
                 <a:latin typeface="Segoe UI"/>
               </a:rPr>
@@ -6518,7 +6518,7 @@
             <a:r>
               <a:rPr sz="1600" b="0">
                 <a:solidFill>
-                  <a:srgbClr val="F5F6FA"/>
+                  <a:srgbClr val="EAF1FB"/>
                 </a:solidFill>
                 <a:latin typeface="Segoe UI"/>
               </a:rPr>
@@ -6553,7 +6553,7 @@
             <a:r>
               <a:rPr sz="1300" b="1">
                 <a:solidFill>
-                  <a:srgbClr val="FDCB6E"/>
+                  <a:srgbClr val="F2B441"/>
                 </a:solidFill>
                 <a:latin typeface="Segoe UI"/>
               </a:rPr>
@@ -6576,7 +6576,7 @@
     <p:bg>
       <p:bgPr>
         <a:solidFill>
-          <a:srgbClr val="0E1117"/>
+          <a:srgbClr val="081527"/>
         </a:solidFill>
         <a:effectLst/>
       </p:bgPr>
@@ -6614,7 +6614,7 @@
             <a:r>
               <a:rPr sz="3200" b="1">
                 <a:solidFill>
-                  <a:srgbClr val="F5F6FA"/>
+                  <a:srgbClr val="EAF1FB"/>
                 </a:solidFill>
                 <a:latin typeface="Segoe UI"/>
               </a:rPr>
@@ -6682,7 +6682,7 @@
             <a:avLst/>
           </a:prstGeom>
           <a:solidFill>
-            <a:srgbClr val="1A1F2E"/>
+            <a:srgbClr val="0E1E34"/>
           </a:solidFill>
           <a:ln w="12700">
             <a:solidFill>
@@ -6774,7 +6774,7 @@
             <a:r>
               <a:rPr sz="1700" b="0">
                 <a:solidFill>
-                  <a:srgbClr val="F5F6FA"/>
+                  <a:srgbClr val="EAF1FB"/>
                 </a:solidFill>
                 <a:latin typeface="Segoe UI"/>
               </a:rPr>
@@ -6798,11 +6798,11 @@
             <a:avLst/>
           </a:prstGeom>
           <a:solidFill>
-            <a:srgbClr val="1A1F2E"/>
+            <a:srgbClr val="0E1E34"/>
           </a:solidFill>
           <a:ln w="12700">
             <a:solidFill>
-              <a:srgbClr val="6C5CE7"/>
+              <a:srgbClr val="2F74C0"/>
             </a:solidFill>
           </a:ln>
           <a:effectLst/>
@@ -6855,7 +6855,7 @@
             <a:r>
               <a:rPr sz="1700" b="1">
                 <a:solidFill>
-                  <a:srgbClr val="6C5CE7"/>
+                  <a:srgbClr val="2F74C0"/>
                 </a:solidFill>
                 <a:latin typeface="Segoe UI"/>
               </a:rPr>
@@ -6890,7 +6890,7 @@
             <a:r>
               <a:rPr sz="1700" b="0">
                 <a:solidFill>
-                  <a:srgbClr val="F5F6FA"/>
+                  <a:srgbClr val="EAF1FB"/>
                 </a:solidFill>
                 <a:latin typeface="Segoe UI"/>
               </a:rPr>
@@ -6914,11 +6914,11 @@
             <a:avLst/>
           </a:prstGeom>
           <a:solidFill>
-            <a:srgbClr val="1A1F2E"/>
+            <a:srgbClr val="0E1E34"/>
           </a:solidFill>
           <a:ln w="12700">
             <a:solidFill>
-              <a:srgbClr val="FDCB6E"/>
+              <a:srgbClr val="F2B441"/>
             </a:solidFill>
           </a:ln>
           <a:effectLst/>
@@ -6971,7 +6971,7 @@
             <a:r>
               <a:rPr sz="1700" b="1">
                 <a:solidFill>
-                  <a:srgbClr val="FDCB6E"/>
+                  <a:srgbClr val="F2B441"/>
                 </a:solidFill>
                 <a:latin typeface="Segoe UI"/>
               </a:rPr>
@@ -7006,7 +7006,7 @@
             <a:r>
               <a:rPr sz="1700" b="0">
                 <a:solidFill>
-                  <a:srgbClr val="F5F6FA"/>
+                  <a:srgbClr val="EAF1FB"/>
                 </a:solidFill>
                 <a:latin typeface="Segoe UI"/>
               </a:rPr>
@@ -7030,7 +7030,7 @@
             <a:avLst/>
           </a:prstGeom>
           <a:solidFill>
-            <a:srgbClr val="1A1F2E"/>
+            <a:srgbClr val="0E1E34"/>
           </a:solidFill>
           <a:ln w="12700">
             <a:solidFill>
@@ -7122,7 +7122,7 @@
             <a:r>
               <a:rPr sz="1700" b="0">
                 <a:solidFill>
-                  <a:srgbClr val="F5F6FA"/>
+                  <a:srgbClr val="EAF1FB"/>
                 </a:solidFill>
                 <a:latin typeface="Segoe UI"/>
               </a:rPr>
@@ -7146,11 +7146,11 @@
             <a:avLst/>
           </a:prstGeom>
           <a:solidFill>
-            <a:srgbClr val="1A1F2E"/>
+            <a:srgbClr val="0E1E34"/>
           </a:solidFill>
           <a:ln w="12700">
             <a:solidFill>
-              <a:srgbClr val="6C5CE7"/>
+              <a:srgbClr val="2F74C0"/>
             </a:solidFill>
           </a:ln>
           <a:effectLst/>
@@ -7203,7 +7203,7 @@
             <a:r>
               <a:rPr sz="1700" b="1">
                 <a:solidFill>
-                  <a:srgbClr val="6C5CE7"/>
+                  <a:srgbClr val="2F74C0"/>
                 </a:solidFill>
                 <a:latin typeface="Segoe UI"/>
               </a:rPr>
@@ -7238,7 +7238,7 @@
             <a:r>
               <a:rPr sz="1700" b="0">
                 <a:solidFill>
-                  <a:srgbClr val="F5F6FA"/>
+                  <a:srgbClr val="EAF1FB"/>
                 </a:solidFill>
                 <a:latin typeface="Segoe UI"/>
               </a:rPr>
@@ -7261,7 +7261,7 @@
     <p:bg>
       <p:bgPr>
         <a:solidFill>
-          <a:srgbClr val="0E1117"/>
+          <a:srgbClr val="081527"/>
         </a:solidFill>
         <a:effectLst/>
       </p:bgPr>
@@ -7299,7 +7299,7 @@
             <a:r>
               <a:rPr sz="3200" b="1">
                 <a:solidFill>
-                  <a:srgbClr val="F5F6FA"/>
+                  <a:srgbClr val="EAF1FB"/>
                 </a:solidFill>
                 <a:latin typeface="Segoe UI"/>
               </a:rPr>
@@ -7367,7 +7367,7 @@
             <a:avLst/>
           </a:prstGeom>
           <a:solidFill>
-            <a:srgbClr val="1A1F2E"/>
+            <a:srgbClr val="0E1E34"/>
           </a:solidFill>
           <a:ln>
             <a:noFill/>
@@ -7457,7 +7457,7 @@
             <a:r>
               <a:rPr sz="1400" b="0">
                 <a:solidFill>
-                  <a:srgbClr val="9AA4B2"/>
+                  <a:srgbClr val="9DB0C8"/>
                 </a:solidFill>
                 <a:latin typeface="Segoe UI"/>
               </a:rPr>
@@ -7481,7 +7481,7 @@
             <a:avLst/>
           </a:prstGeom>
           <a:solidFill>
-            <a:srgbClr val="1A1F2E"/>
+            <a:srgbClr val="0E1E34"/>
           </a:solidFill>
           <a:ln>
             <a:noFill/>
@@ -7536,7 +7536,7 @@
             <a:r>
               <a:rPr sz="3400" b="1">
                 <a:solidFill>
-                  <a:srgbClr val="F5F6FA"/>
+                  <a:srgbClr val="EAF1FB"/>
                 </a:solidFill>
                 <a:latin typeface="Segoe UI"/>
               </a:rPr>
@@ -7571,7 +7571,7 @@
             <a:r>
               <a:rPr sz="1400" b="0">
                 <a:solidFill>
-                  <a:srgbClr val="9AA4B2"/>
+                  <a:srgbClr val="9DB0C8"/>
                 </a:solidFill>
                 <a:latin typeface="Segoe UI"/>
               </a:rPr>
@@ -7595,7 +7595,7 @@
             <a:avLst/>
           </a:prstGeom>
           <a:solidFill>
-            <a:srgbClr val="1A1F2E"/>
+            <a:srgbClr val="0E1E34"/>
           </a:solidFill>
           <a:ln>
             <a:noFill/>
@@ -7654,7 +7654,7 @@
                 </a:solidFill>
                 <a:latin typeface="Segoe UI"/>
               </a:rPr>
-              <a:t>$U 868.9M</a:t>
+              <a:t>$U 861.6M</a:t>
             </a:r>
           </a:p>
         </p:txBody>
@@ -7685,11 +7685,11 @@
             <a:r>
               <a:rPr sz="1400" b="0">
                 <a:solidFill>
-                  <a:srgbClr val="9AA4B2"/>
-                </a:solidFill>
-                <a:latin typeface="Segoe UI"/>
-              </a:rPr>
-              <a:t>Recupero esperado (49%)</a:t>
+                  <a:srgbClr val="9DB0C8"/>
+                </a:solidFill>
+                <a:latin typeface="Segoe UI"/>
+              </a:rPr>
+              <a:t>Recupero esperado (48%)</a:t>
             </a:r>
           </a:p>
         </p:txBody>
@@ -7709,7 +7709,7 @@
             <a:avLst/>
           </a:prstGeom>
           <a:solidFill>
-            <a:srgbClr val="1A1F2E"/>
+            <a:srgbClr val="0E1E34"/>
           </a:solidFill>
           <a:ln>
             <a:noFill/>
@@ -7764,7 +7764,7 @@
             <a:r>
               <a:rPr sz="3400" b="1">
                 <a:solidFill>
-                  <a:srgbClr val="6C5CE7"/>
+                  <a:srgbClr val="2F74C0"/>
                 </a:solidFill>
                 <a:latin typeface="Segoe UI"/>
               </a:rPr>
@@ -7799,7 +7799,7 @@
             <a:r>
               <a:rPr sz="1400" b="0">
                 <a:solidFill>
-                  <a:srgbClr val="9AA4B2"/>
+                  <a:srgbClr val="9DB0C8"/>
                 </a:solidFill>
                 <a:latin typeface="Segoe UI"/>
               </a:rPr>
@@ -7823,7 +7823,7 @@
             <a:avLst/>
           </a:prstGeom>
           <a:solidFill>
-            <a:srgbClr val="1A1F2E"/>
+            <a:srgbClr val="0E1E34"/>
           </a:solidFill>
           <a:ln>
             <a:noFill/>
@@ -7878,11 +7878,11 @@
             <a:r>
               <a:rPr sz="3400" b="1">
                 <a:solidFill>
-                  <a:srgbClr val="FDCB6E"/>
-                </a:solidFill>
-                <a:latin typeface="Segoe UI"/>
-              </a:rPr>
-              <a:t>$U 621.4M</a:t>
+                  <a:srgbClr val="F2B441"/>
+                </a:solidFill>
+                <a:latin typeface="Segoe UI"/>
+              </a:rPr>
+              <a:t>$U 636.6M</a:t>
             </a:r>
           </a:p>
         </p:txBody>
@@ -7913,7 +7913,7 @@
             <a:r>
               <a:rPr sz="1400" b="0">
                 <a:solidFill>
-                  <a:srgbClr val="9AA4B2"/>
+                  <a:srgbClr val="9DB0C8"/>
                 </a:solidFill>
                 <a:latin typeface="Segoe UI"/>
               </a:rPr>
@@ -7937,7 +7937,7 @@
             <a:avLst/>
           </a:prstGeom>
           <a:solidFill>
-            <a:srgbClr val="1A1F2E"/>
+            <a:srgbClr val="0E1E34"/>
           </a:solidFill>
           <a:ln>
             <a:noFill/>
@@ -8027,7 +8027,7 @@
             <a:r>
               <a:rPr sz="1400" b="0">
                 <a:solidFill>
-                  <a:srgbClr val="9AA4B2"/>
+                  <a:srgbClr val="9DB0C8"/>
                 </a:solidFill>
                 <a:latin typeface="Segoe UI"/>
               </a:rPr>
@@ -8062,11 +8062,11 @@
             <a:r>
               <a:rPr sz="1400" b="0">
                 <a:solidFill>
-                  <a:srgbClr val="9AA4B2"/>
-                </a:solidFill>
-                <a:latin typeface="Segoe UI"/>
-              </a:rPr>
-              <a:t>Datos sintéticos ilustrativos: muestran cómo Kobra prioriza el esfuerzo donde está el valor recuperable. Con la cartera real, estos KPIs se calculan de verdad.</a:t>
+                  <a:srgbClr val="9DB0C8"/>
+                </a:solidFill>
+                <a:latin typeface="Segoe UI"/>
+              </a:rPr>
+              <a:t>Datos sintéticos ilustrativos: muestran cómo MV Kobra AI prioriza el esfuerzo donde está el valor recuperable. Con la cartera real, estos KPIs se calculan de verdad.</a:t>
             </a:r>
           </a:p>
         </p:txBody>
@@ -8085,7 +8085,7 @@
     <p:bg>
       <p:bgPr>
         <a:solidFill>
-          <a:srgbClr val="0E1117"/>
+          <a:srgbClr val="081527"/>
         </a:solidFill>
         <a:effectLst/>
       </p:bgPr>
@@ -8158,7 +8158,7 @@
             <a:r>
               <a:rPr sz="1500" b="0">
                 <a:solidFill>
-                  <a:srgbClr val="9AA4B2"/>
+                  <a:srgbClr val="9DB0C8"/>
                 </a:solidFill>
                 <a:latin typeface="Segoe UI"/>
               </a:rPr>
@@ -8184,7 +8184,7 @@
           <a:noFill/>
           <a:ln w="12700">
             <a:solidFill>
-              <a:srgbClr val="6C5CE7"/>
+              <a:srgbClr val="2F74C0"/>
             </a:solidFill>
           </a:ln>
           <a:effectLst/>
@@ -8249,7 +8249,7 @@
     <p:bg>
       <p:bgPr>
         <a:solidFill>
-          <a:srgbClr val="0E1117"/>
+          <a:srgbClr val="081527"/>
         </a:solidFill>
         <a:effectLst/>
       </p:bgPr>
@@ -8322,7 +8322,7 @@
             <a:r>
               <a:rPr sz="1500" b="0">
                 <a:solidFill>
-                  <a:srgbClr val="9AA4B2"/>
+                  <a:srgbClr val="9DB0C8"/>
                 </a:solidFill>
                 <a:latin typeface="Segoe UI"/>
               </a:rPr>
@@ -8348,7 +8348,7 @@
           <a:noFill/>
           <a:ln w="12700">
             <a:solidFill>
-              <a:srgbClr val="6C5CE7"/>
+              <a:srgbClr val="2F74C0"/>
             </a:solidFill>
           </a:ln>
           <a:effectLst/>
@@ -8413,7 +8413,7 @@
     <p:bg>
       <p:bgPr>
         <a:solidFill>
-          <a:srgbClr val="0E1117"/>
+          <a:srgbClr val="081527"/>
         </a:solidFill>
         <a:effectLst/>
       </p:bgPr>
@@ -8486,7 +8486,7 @@
             <a:r>
               <a:rPr sz="1500" b="0">
                 <a:solidFill>
-                  <a:srgbClr val="9AA4B2"/>
+                  <a:srgbClr val="9DB0C8"/>
                 </a:solidFill>
                 <a:latin typeface="Segoe UI"/>
               </a:rPr>
@@ -8512,7 +8512,7 @@
           <a:noFill/>
           <a:ln w="12700">
             <a:solidFill>
-              <a:srgbClr val="6C5CE7"/>
+              <a:srgbClr val="2F74C0"/>
             </a:solidFill>
           </a:ln>
           <a:effectLst/>
@@ -8577,7 +8577,7 @@
     <p:bg>
       <p:bgPr>
         <a:solidFill>
-          <a:srgbClr val="0E1117"/>
+          <a:srgbClr val="081527"/>
         </a:solidFill>
         <a:effectLst/>
       </p:bgPr>
@@ -8650,7 +8650,7 @@
             <a:r>
               <a:rPr sz="1500" b="0">
                 <a:solidFill>
-                  <a:srgbClr val="9AA4B2"/>
+                  <a:srgbClr val="9DB0C8"/>
                 </a:solidFill>
                 <a:latin typeface="Segoe UI"/>
               </a:rPr>
@@ -8676,7 +8676,7 @@
           <a:noFill/>
           <a:ln w="12700">
             <a:solidFill>
-              <a:srgbClr val="6C5CE7"/>
+              <a:srgbClr val="2F74C0"/>
             </a:solidFill>
           </a:ln>
           <a:effectLst/>
